--- a/docs/ppt-book/projets/Projet2-Pitch-commercial.pptx
+++ b/docs/ppt-book/projets/Projet2-Pitch-commercial.pptx
@@ -112,19 +112,19 @@
   <p:extLst>
     <p:ext uri="{521415D9-36F7-43E2-AB2F-B90AF26B5E84}">
       <p14:sectionLst xmlns:p14="http://schemas.microsoft.com/office/powerpoint/2010/main">
-        <p14:section name="البداية" id="{88a82781-6919-db5d-ab7b-38314bf4cd30}">
+        <p14:section name="البداية" id="{64466471-7a64-e5ea-2a11-6e0bcf3f74f3}">
           <p14:sldIdLst>
             <p14:sldId id="256"/>
             <p14:sldId id="257"/>
           </p14:sldIdLst>
         </p14:section>
-        <p14:section name="الحل" id="{c0311515-408a-69c9-c62e-aaccfbd04dbc}">
+        <p14:section name="الحل" id="{1ebfce48-3366-f877-29fb-dadf29eba1e2}">
           <p14:sldIdLst>
             <p14:sldId id="258"/>
             <p14:sldId id="259"/>
           </p14:sldIdLst>
         </p14:section>
-        <p14:section name="العرض" id="{c4a5a12a-8b46-eff8-98d6-cb1db04a1892}">
+        <p14:section name="العرض" id="{0d1dbb0b-e18d-457f-47ff-cb0889eb616a}">
           <p14:sldIdLst>
             <p14:sldId id="260"/>
             <p14:sldId id="261"/>
